--- a/docs/resources/slides/04_Presentation_of_action_plans_consolidated.pptx
+++ b/docs/resources/slides/04_Presentation_of_action_plans_consolidated.pptx
@@ -254,7 +254,7 @@
           <a:p>
             <a:fld id="{28647F05-0506-494A-8060-3F395B947DF9}" type="datetimeFigureOut">
               <a:rPr lang="en-US" smtClean="0"/>
-              <a:t>8/16/2026</a:t>
+              <a:t>8/27/2026</a:t>
             </a:fld>
             <a:endParaRPr lang="en-US"/>
           </a:p>
@@ -431,7 +431,7 @@
           <a:p>
             <a:fld id="{08BC0A13-3F3D-45D4-B17C-1E0ACF36A6FB}" type="datetimeFigureOut">
               <a:rPr lang="en-US" smtClean="0"/>
-              <a:t>8/16/2026</a:t>
+              <a:t>8/27/2026</a:t>
             </a:fld>
             <a:endParaRPr lang="en-US"/>
           </a:p>
@@ -13998,7 +13998,21 @@
                 <a:ea typeface="+mn-lt"/>
                 <a:cs typeface="+mn-lt"/>
               </a:rPr>
-              <a:t>Identify opportunities to incorporate Sustainable Development concepts and topics. These could include the Sustainable Development Goals (or other relevant frameworks), global sustainability challenges, or different sustainability perspectives. </a:t>
+              <a:t>Identify opportunities to incorporate Sustainable Development concepts and topics. These could include the Sustainable Development Goals (</a:t>
+            </a:r>
+            <a:r>
+              <a:rPr lang="en-CH" sz="1800" dirty="0">
+                <a:ea typeface="+mn-lt"/>
+                <a:cs typeface="+mn-lt"/>
+              </a:rPr>
+              <a:t>+</a:t>
+            </a:r>
+            <a:r>
+              <a:rPr lang="en-GB" sz="1800" dirty="0">
+                <a:ea typeface="+mn-lt"/>
+                <a:cs typeface="+mn-lt"/>
+              </a:rPr>
+              <a:t>other relevant frameworks), global sustainability challenges, or different sustainability perspectives. </a:t>
             </a:r>
             <a:r>
               <a:rPr lang="en-GB" sz="1800" dirty="0"/>
@@ -16373,37 +16387,29 @@
 </file>
 
 <file path=customXml/item1.xml><?xml version="1.0" encoding="utf-8"?>
-<?mso-contentType ?>
-<FormTemplates xmlns="http://schemas.microsoft.com/sharepoint/v3/contenttype/forms">
-  <Display>DocumentLibraryForm</Display>
-  <Edit>DocumentLibraryForm</Edit>
-  <New>DocumentLibraryForm</New>
-</FormTemplates>
-</file>
-
-<file path=customXml/item2.xml><?xml version="1.0" encoding="utf-8"?>
-<ct:contentTypeSchema xmlns:ct="http://schemas.microsoft.com/office/2006/metadata/contentType" xmlns:ma="http://schemas.microsoft.com/office/2006/metadata/properties/metaAttributes" ct:_="" ma:_="" ma:contentTypeName="Document" ma:contentTypeID="0x01010079F111ED35F8CC479449609E8A0923A6" ma:contentTypeVersion="12" ma:contentTypeDescription="Create a new document." ma:contentTypeScope="" ma:versionID="426e97fa315356fffbdcd9876fe988c2">
-  <xsd:schema xmlns:xsd="http://www.w3.org/2001/XMLSchema" xmlns:xs="http://www.w3.org/2001/XMLSchema" xmlns:p="http://schemas.microsoft.com/office/2006/metadata/properties" xmlns:ns2="71af3243-3dd4-4a8d-8c0d-dd76da1f02a5" xmlns:ns3="16c05727-aa75-4e4a-9b5f-8a80a1165891" targetNamespace="http://schemas.microsoft.com/office/2006/metadata/properties" ma:root="true" ma:fieldsID="14b8f0def80e6d70ce3def20c90759ae" ns2:_="" ns3:_="">
-    <xsd:import namespace="71af3243-3dd4-4a8d-8c0d-dd76da1f02a5"/>
-    <xsd:import namespace="16c05727-aa75-4e4a-9b5f-8a80a1165891"/>
+<ct:contentTypeSchema xmlns:ct="http://schemas.microsoft.com/office/2006/metadata/contentType" xmlns:ma="http://schemas.microsoft.com/office/2006/metadata/properties/metaAttributes" ct:_="" ma:_="" ma:contentTypeName="Document" ma:contentTypeID="0x010100599DE173C41AD748B4060AEB6BE3D8C9" ma:contentTypeVersion="14" ma:contentTypeDescription="Create a new document." ma:contentTypeScope="" ma:versionID="ad2f6bcab80e0124e392d68d2324b5e4">
+  <xsd:schema xmlns:xsd="http://www.w3.org/2001/XMLSchema" xmlns:xs="http://www.w3.org/2001/XMLSchema" xmlns:p="http://schemas.microsoft.com/office/2006/metadata/properties" xmlns:ns2="5718835e-0d9f-44bb-9dc0-be88827e798a" xmlns:ns3="8ac16dc0-0dc9-49ab-99db-6bc168e4b9ef" targetNamespace="http://schemas.microsoft.com/office/2006/metadata/properties" ma:root="true" ma:fieldsID="2569b1ad6a7deb867c851da986e7547d" ns2:_="" ns3:_="">
+    <xsd:import namespace="5718835e-0d9f-44bb-9dc0-be88827e798a"/>
+    <xsd:import namespace="8ac16dc0-0dc9-49ab-99db-6bc168e4b9ef"/>
     <xsd:element name="properties">
       <xsd:complexType>
         <xsd:sequence>
           <xsd:element name="documentManagement">
             <xsd:complexType>
               <xsd:all>
-                <xsd:element ref="ns2:MediaServiceMetadata" minOccurs="0"/>
-                <xsd:element ref="ns2:MediaServiceFastMetadata" minOccurs="0"/>
-                <xsd:element ref="ns2:MediaServiceOCR" minOccurs="0"/>
-                <xsd:element ref="ns2:MediaServiceAutoTags" minOccurs="0"/>
-                <xsd:element ref="ns2:MediaServiceEventHashCode" minOccurs="0"/>
-                <xsd:element ref="ns2:MediaServiceGenerationTime" minOccurs="0"/>
-                <xsd:element ref="ns3:SharedWithUsers" minOccurs="0"/>
-                <xsd:element ref="ns3:SharedWithDetails" minOccurs="0"/>
-                <xsd:element ref="ns2:MediaServiceAutoKeyPoints" minOccurs="0"/>
-                <xsd:element ref="ns2:MediaServiceKeyPoints" minOccurs="0"/>
-                <xsd:element ref="ns2:MediaServiceDateTaken" minOccurs="0"/>
-                <xsd:element ref="ns2:Status" minOccurs="0"/>
+                <xsd:element ref="ns2:SharedWithUsers" minOccurs="0"/>
+                <xsd:element ref="ns2:SharedWithDetails" minOccurs="0"/>
+                <xsd:element ref="ns3:MediaServiceMetadata" minOccurs="0"/>
+                <xsd:element ref="ns3:MediaServiceFastMetadata" minOccurs="0"/>
+                <xsd:element ref="ns3:MediaServiceObjectDetectorVersions" minOccurs="0"/>
+                <xsd:element ref="ns3:Bemerkungen" minOccurs="0"/>
+                <xsd:element ref="ns3:MediaServiceSearchProperties" minOccurs="0"/>
+                <xsd:element ref="ns3:MediaServiceDateTaken" minOccurs="0"/>
+                <xsd:element ref="ns3:MediaServiceGenerationTime" minOccurs="0"/>
+                <xsd:element ref="ns3:MediaServiceEventHashCode" minOccurs="0"/>
+                <xsd:element ref="ns3:lcf76f155ced4ddcb4097134ff3c332f" minOccurs="0"/>
+                <xsd:element ref="ns2:TaxCatchAll" minOccurs="0"/>
+                <xsd:element ref="ns3:MediaServiceOCR" minOccurs="0"/>
               </xsd:all>
             </xsd:complexType>
           </xsd:element>
@@ -16411,72 +16417,10 @@
       </xsd:complexType>
     </xsd:element>
   </xsd:schema>
-  <xsd:schema xmlns:xsd="http://www.w3.org/2001/XMLSchema" xmlns:xs="http://www.w3.org/2001/XMLSchema" xmlns:dms="http://schemas.microsoft.com/office/2006/documentManagement/types" xmlns:pc="http://schemas.microsoft.com/office/infopath/2007/PartnerControls" targetNamespace="71af3243-3dd4-4a8d-8c0d-dd76da1f02a5" elementFormDefault="qualified">
+  <xsd:schema xmlns:xsd="http://www.w3.org/2001/XMLSchema" xmlns:xs="http://www.w3.org/2001/XMLSchema" xmlns:dms="http://schemas.microsoft.com/office/2006/documentManagement/types" xmlns:pc="http://schemas.microsoft.com/office/infopath/2007/PartnerControls" targetNamespace="5718835e-0d9f-44bb-9dc0-be88827e798a" elementFormDefault="qualified">
     <xsd:import namespace="http://schemas.microsoft.com/office/2006/documentManagement/types"/>
     <xsd:import namespace="http://schemas.microsoft.com/office/infopath/2007/PartnerControls"/>
-    <xsd:element name="MediaServiceMetadata" ma:index="8" nillable="true" ma:displayName="MediaServiceMetadata" ma:hidden="true" ma:internalName="MediaServiceMetadata" ma:readOnly="true">
-      <xsd:simpleType>
-        <xsd:restriction base="dms:Note"/>
-      </xsd:simpleType>
-    </xsd:element>
-    <xsd:element name="MediaServiceFastMetadata" ma:index="9" nillable="true" ma:displayName="MediaServiceFastMetadata" ma:hidden="true" ma:internalName="MediaServiceFastMetadata" ma:readOnly="true">
-      <xsd:simpleType>
-        <xsd:restriction base="dms:Note"/>
-      </xsd:simpleType>
-    </xsd:element>
-    <xsd:element name="MediaServiceOCR" ma:index="10" nillable="true" ma:displayName="MediaServiceOCR" ma:internalName="MediaServiceOCR" ma:readOnly="true">
-      <xsd:simpleType>
-        <xsd:restriction base="dms:Note">
-          <xsd:maxLength value="255"/>
-        </xsd:restriction>
-      </xsd:simpleType>
-    </xsd:element>
-    <xsd:element name="MediaServiceAutoTags" ma:index="11" nillable="true" ma:displayName="MediaServiceAutoTags" ma:internalName="MediaServiceAutoTags" ma:readOnly="true">
-      <xsd:simpleType>
-        <xsd:restriction base="dms:Text"/>
-      </xsd:simpleType>
-    </xsd:element>
-    <xsd:element name="MediaServiceEventHashCode" ma:index="12" nillable="true" ma:displayName="MediaServiceEventHashCode" ma:hidden="true" ma:internalName="MediaServiceEventHashCode" ma:readOnly="true">
-      <xsd:simpleType>
-        <xsd:restriction base="dms:Text"/>
-      </xsd:simpleType>
-    </xsd:element>
-    <xsd:element name="MediaServiceGenerationTime" ma:index="13" nillable="true" ma:displayName="MediaServiceGenerationTime" ma:hidden="true" ma:internalName="MediaServiceGenerationTime" ma:readOnly="true">
-      <xsd:simpleType>
-        <xsd:restriction base="dms:Text"/>
-      </xsd:simpleType>
-    </xsd:element>
-    <xsd:element name="MediaServiceAutoKeyPoints" ma:index="16" nillable="true" ma:displayName="MediaServiceAutoKeyPoints" ma:hidden="true" ma:internalName="MediaServiceAutoKeyPoints" ma:readOnly="true">
-      <xsd:simpleType>
-        <xsd:restriction base="dms:Note"/>
-      </xsd:simpleType>
-    </xsd:element>
-    <xsd:element name="MediaServiceKeyPoints" ma:index="17" nillable="true" ma:displayName="KeyPoints" ma:internalName="MediaServiceKeyPoints" ma:readOnly="false">
-      <xsd:simpleType>
-        <xsd:restriction base="dms:Note">
-          <xsd:maxLength value="255"/>
-        </xsd:restriction>
-      </xsd:simpleType>
-    </xsd:element>
-    <xsd:element name="MediaServiceDateTaken" ma:index="18" nillable="true" ma:displayName="MediaServiceDateTaken" ma:hidden="true" ma:internalName="MediaServiceDateTaken" ma:readOnly="true">
-      <xsd:simpleType>
-        <xsd:restriction base="dms:Text"/>
-      </xsd:simpleType>
-    </xsd:element>
-    <xsd:element name="Status" ma:index="19" nillable="true" ma:displayName="Status" ma:default="Not started" ma:format="Dropdown" ma:internalName="Status">
-      <xsd:simpleType>
-        <xsd:restriction base="dms:Choice">
-          <xsd:enumeration value="Not started"/>
-          <xsd:enumeration value="In Progress"/>
-          <xsd:enumeration value="Completed"/>
-        </xsd:restriction>
-      </xsd:simpleType>
-    </xsd:element>
-  </xsd:schema>
-  <xsd:schema xmlns:xsd="http://www.w3.org/2001/XMLSchema" xmlns:xs="http://www.w3.org/2001/XMLSchema" xmlns:dms="http://schemas.microsoft.com/office/2006/documentManagement/types" xmlns:pc="http://schemas.microsoft.com/office/infopath/2007/PartnerControls" targetNamespace="16c05727-aa75-4e4a-9b5f-8a80a1165891" elementFormDefault="qualified">
-    <xsd:import namespace="http://schemas.microsoft.com/office/2006/documentManagement/types"/>
-    <xsd:import namespace="http://schemas.microsoft.com/office/infopath/2007/PartnerControls"/>
-    <xsd:element name="SharedWithUsers" ma:index="14" nillable="true" ma:displayName="Shared With" ma:internalName="SharedWithUsers" ma:readOnly="true">
+    <xsd:element name="SharedWithUsers" ma:index="8" nillable="true" ma:displayName="Shared With" ma:internalName="SharedWithUsers" ma:readOnly="true">
       <xsd:complexType>
         <xsd:complexContent>
           <xsd:extension base="dms:UserMulti">
@@ -16495,7 +16439,78 @@
         </xsd:complexContent>
       </xsd:complexType>
     </xsd:element>
-    <xsd:element name="SharedWithDetails" ma:index="15" nillable="true" ma:displayName="Shared With Details" ma:internalName="SharedWithDetails" ma:readOnly="true">
+    <xsd:element name="SharedWithDetails" ma:index="9" nillable="true" ma:displayName="Shared With Details" ma:internalName="SharedWithDetails" ma:readOnly="true">
+      <xsd:simpleType>
+        <xsd:restriction base="dms:Note">
+          <xsd:maxLength value="255"/>
+        </xsd:restriction>
+      </xsd:simpleType>
+    </xsd:element>
+    <xsd:element name="TaxCatchAll" ma:index="20" nillable="true" ma:displayName="Taxonomy Catch All Column" ma:hidden="true" ma:list="{811161c7-2b90-4bdd-9555-9b979c9f9aa6}" ma:internalName="TaxCatchAll" ma:showField="CatchAllData" ma:web="5718835e-0d9f-44bb-9dc0-be88827e798a">
+      <xsd:complexType>
+        <xsd:complexContent>
+          <xsd:extension base="dms:MultiChoiceLookup">
+            <xsd:sequence>
+              <xsd:element name="Value" type="dms:Lookup" maxOccurs="unbounded" minOccurs="0" nillable="true"/>
+            </xsd:sequence>
+          </xsd:extension>
+        </xsd:complexContent>
+      </xsd:complexType>
+    </xsd:element>
+  </xsd:schema>
+  <xsd:schema xmlns:xsd="http://www.w3.org/2001/XMLSchema" xmlns:xs="http://www.w3.org/2001/XMLSchema" xmlns:dms="http://schemas.microsoft.com/office/2006/documentManagement/types" xmlns:pc="http://schemas.microsoft.com/office/infopath/2007/PartnerControls" targetNamespace="8ac16dc0-0dc9-49ab-99db-6bc168e4b9ef" elementFormDefault="qualified">
+    <xsd:import namespace="http://schemas.microsoft.com/office/2006/documentManagement/types"/>
+    <xsd:import namespace="http://schemas.microsoft.com/office/infopath/2007/PartnerControls"/>
+    <xsd:element name="MediaServiceMetadata" ma:index="10" nillable="true" ma:displayName="MediaServiceMetadata" ma:hidden="true" ma:internalName="MediaServiceMetadata" ma:readOnly="true">
+      <xsd:simpleType>
+        <xsd:restriction base="dms:Note"/>
+      </xsd:simpleType>
+    </xsd:element>
+    <xsd:element name="MediaServiceFastMetadata" ma:index="11" nillable="true" ma:displayName="MediaServiceFastMetadata" ma:hidden="true" ma:internalName="MediaServiceFastMetadata" ma:readOnly="true">
+      <xsd:simpleType>
+        <xsd:restriction base="dms:Note"/>
+      </xsd:simpleType>
+    </xsd:element>
+    <xsd:element name="MediaServiceObjectDetectorVersions" ma:index="12" nillable="true" ma:displayName="MediaServiceObjectDetectorVersions" ma:hidden="true" ma:indexed="true" ma:internalName="MediaServiceObjectDetectorVersions" ma:readOnly="true">
+      <xsd:simpleType>
+        <xsd:restriction base="dms:Text"/>
+      </xsd:simpleType>
+    </xsd:element>
+    <xsd:element name="Bemerkungen" ma:index="13" nillable="true" ma:displayName="Bemerkungen" ma:format="Dropdown" ma:internalName="Bemerkungen">
+      <xsd:simpleType>
+        <xsd:restriction base="dms:Note">
+          <xsd:maxLength value="255"/>
+        </xsd:restriction>
+      </xsd:simpleType>
+    </xsd:element>
+    <xsd:element name="MediaServiceSearchProperties" ma:index="14" nillable="true" ma:displayName="MediaServiceSearchProperties" ma:hidden="true" ma:internalName="MediaServiceSearchProperties" ma:readOnly="true">
+      <xsd:simpleType>
+        <xsd:restriction base="dms:Note"/>
+      </xsd:simpleType>
+    </xsd:element>
+    <xsd:element name="MediaServiceDateTaken" ma:index="15" nillable="true" ma:displayName="MediaServiceDateTaken" ma:hidden="true" ma:indexed="true" ma:internalName="MediaServiceDateTaken" ma:readOnly="true">
+      <xsd:simpleType>
+        <xsd:restriction base="dms:Text"/>
+      </xsd:simpleType>
+    </xsd:element>
+    <xsd:element name="MediaServiceGenerationTime" ma:index="16" nillable="true" ma:displayName="MediaServiceGenerationTime" ma:hidden="true" ma:internalName="MediaServiceGenerationTime" ma:readOnly="true">
+      <xsd:simpleType>
+        <xsd:restriction base="dms:Text"/>
+      </xsd:simpleType>
+    </xsd:element>
+    <xsd:element name="MediaServiceEventHashCode" ma:index="17" nillable="true" ma:displayName="MediaServiceEventHashCode" ma:hidden="true" ma:internalName="MediaServiceEventHashCode" ma:readOnly="true">
+      <xsd:simpleType>
+        <xsd:restriction base="dms:Text"/>
+      </xsd:simpleType>
+    </xsd:element>
+    <xsd:element name="lcf76f155ced4ddcb4097134ff3c332f" ma:index="19" nillable="true" ma:taxonomy="true" ma:internalName="lcf76f155ced4ddcb4097134ff3c332f" ma:taxonomyFieldName="MediaServiceImageTags" ma:displayName="Image Tags" ma:readOnly="false" ma:fieldId="{5cf76f15-5ced-4ddc-b409-7134ff3c332f}" ma:taxonomyMulti="true" ma:sspId="a84686df-39cf-4bac-acb0-1572f53f1b5d" ma:termSetId="09814cd3-568e-fe90-9814-8d621ff8fb84" ma:anchorId="fba54fb3-c3e1-fe81-a776-ca4b69148c4d" ma:open="true" ma:isKeyword="false">
+      <xsd:complexType>
+        <xsd:sequence>
+          <xsd:element ref="pc:Terms" minOccurs="0" maxOccurs="1"/>
+        </xsd:sequence>
+      </xsd:complexType>
+    </xsd:element>
+    <xsd:element name="MediaServiceOCR" ma:index="21" nillable="true" ma:displayName="Extracted Text" ma:internalName="MediaServiceOCR" ma:readOnly="true">
       <xsd:simpleType>
         <xsd:restriction base="dms:Note">
           <xsd:maxLength value="255"/>
@@ -16602,43 +16617,32 @@
 </ct:contentTypeSchema>
 </file>
 
-<file path=customXml/item3.xml><?xml version="1.0" encoding="utf-8"?>
+<file path=customXml/item2.xml><?xml version="1.0" encoding="utf-8"?>
 <p:properties xmlns:p="http://schemas.microsoft.com/office/2006/metadata/properties" xmlns:xsi="http://www.w3.org/2001/XMLSchema-instance" xmlns:pc="http://schemas.microsoft.com/office/infopath/2007/PartnerControls">
   <documentManagement>
-    <Status xmlns="71af3243-3dd4-4a8d-8c0d-dd76da1f02a5">Not started</Status>
-    <MediaServiceKeyPoints xmlns="71af3243-3dd4-4a8d-8c0d-dd76da1f02a5" xsi:nil="true"/>
+    <lcf76f155ced4ddcb4097134ff3c332f xmlns="8ac16dc0-0dc9-49ab-99db-6bc168e4b9ef">
+      <Terms xmlns="http://schemas.microsoft.com/office/infopath/2007/PartnerControls"/>
+    </lcf76f155ced4ddcb4097134ff3c332f>
+    <Bemerkungen xmlns="8ac16dc0-0dc9-49ab-99db-6bc168e4b9ef" xsi:nil="true"/>
+    <TaxCatchAll xmlns="5718835e-0d9f-44bb-9dc0-be88827e798a" xsi:nil="true"/>
   </documentManagement>
 </p:properties>
 </file>
 
+<file path=customXml/item3.xml><?xml version="1.0" encoding="utf-8"?>
+<?mso-contentType ?>
+<FormTemplates xmlns="http://schemas.microsoft.com/sharepoint/v3/contenttype/forms">
+  <Display>DocumentLibraryForm</Display>
+  <Edit>DocumentLibraryForm</Edit>
+  <New>DocumentLibraryForm</New>
+</FormTemplates>
+</file>
+
 <file path=customXml/itemProps1.xml><?xml version="1.0" encoding="utf-8"?>
-<ds:datastoreItem xmlns:ds="http://schemas.openxmlformats.org/officeDocument/2006/customXml" ds:itemID="{B927DC71-2909-427C-BDB0-3E47E2101517}">
-  <ds:schemaRefs>
-    <ds:schemaRef ds:uri="http://schemas.microsoft.com/sharepoint/v3/contenttype/forms"/>
-  </ds:schemaRefs>
-</ds:datastoreItem>
+<ds:datastoreItem xmlns:ds="http://schemas.openxmlformats.org/officeDocument/2006/customXml" ds:itemID="{2BF1D721-85B6-43FA-8A8A-14B8BDCA17B8}"/>
 </file>
 
 <file path=customXml/itemProps2.xml><?xml version="1.0" encoding="utf-8"?>
-<ds:datastoreItem xmlns:ds="http://schemas.openxmlformats.org/officeDocument/2006/customXml" ds:itemID="{1DF0A252-5923-47A2-A53A-F9BF72908919}">
-  <ds:schemaRefs>
-    <ds:schemaRef ds:uri="16c05727-aa75-4e4a-9b5f-8a80a1165891"/>
-    <ds:schemaRef ds:uri="71af3243-3dd4-4a8d-8c0d-dd76da1f02a5"/>
-    <ds:schemaRef ds:uri="http://purl.org/dc/elements/1.1/"/>
-    <ds:schemaRef ds:uri="http://purl.org/dc/terms/"/>
-    <ds:schemaRef ds:uri="http://schemas.microsoft.com/internal/obd"/>
-    <ds:schemaRef ds:uri="http://schemas.microsoft.com/office/2006/documentManagement/types"/>
-    <ds:schemaRef ds:uri="http://schemas.microsoft.com/office/2006/metadata/contentType"/>
-    <ds:schemaRef ds:uri="http://schemas.microsoft.com/office/2006/metadata/properties"/>
-    <ds:schemaRef ds:uri="http://schemas.microsoft.com/office/2006/metadata/properties/metaAttributes"/>
-    <ds:schemaRef ds:uri="http://schemas.microsoft.com/office/infopath/2007/PartnerControls"/>
-    <ds:schemaRef ds:uri="http://schemas.openxmlformats.org/package/2006/metadata/core-properties"/>
-    <ds:schemaRef ds:uri="http://www.w3.org/2001/XMLSchema"/>
-  </ds:schemaRefs>
-</ds:datastoreItem>
-</file>
-
-<file path=customXml/itemProps3.xml><?xml version="1.0" encoding="utf-8"?>
 <ds:datastoreItem xmlns:ds="http://schemas.openxmlformats.org/officeDocument/2006/customXml" ds:itemID="{290D7697-8E53-4EA8-8CBB-9C19575257BF}">
   <ds:schemaRefs>
     <ds:schemaRef ds:uri="71af3243-3dd4-4a8d-8c0d-dd76da1f02a5"/>
@@ -16648,6 +16652,14 @@
 </ds:datastoreItem>
 </file>
 
+<file path=customXml/itemProps3.xml><?xml version="1.0" encoding="utf-8"?>
+<ds:datastoreItem xmlns:ds="http://schemas.openxmlformats.org/officeDocument/2006/customXml" ds:itemID="{B927DC71-2909-427C-BDB0-3E47E2101517}">
+  <ds:schemaRefs>
+    <ds:schemaRef ds:uri="http://schemas.microsoft.com/sharepoint/v3/contenttype/forms"/>
+  </ds:schemaRefs>
+</ds:datastoreItem>
+</file>
+
 <file path=docMetadata/LabelInfo.xml><?xml version="1.0" encoding="utf-8"?>
 <clbl:labelList xmlns:clbl="http://schemas.microsoft.com/office/2020/mipLabelMetadata">
   <clbl:label id="{d400387a-212f-43ea-ac7f-77aa12d7977e}" enabled="0" method="" siteId="{d400387a-212f-43ea-ac7f-77aa12d7977e}" removed="1"/>
